--- a/compute-set/ComputeVue-set.pptx
+++ b/compute-set/ComputeVue-set.pptx
@@ -4702,13 +4702,16 @@
           <a:lstStyle/>
           <a:p>
             <a:r>
-              <a:rPr lang="en-US" dirty="0">
-                <a:solidFill>
-                  <a:srgbClr val="FF0000"/>
-                </a:solidFill>
-              </a:rPr>
-              <a:t>compute-set-upper-src1.zip</a:t>
-            </a:r>
+              <a:rPr lang="en-US" u="sng" dirty="0">
+                <a:hlinkClick r:id="rId3" tooltip="compute-watch.zip"/>
+              </a:rPr>
+              <a:t>compute-watch.zip</a:t>
+            </a:r>
+            <a:endParaRPr lang="en-US" dirty="0">
+              <a:solidFill>
+                <a:srgbClr val="FF0000"/>
+              </a:solidFill>
+            </a:endParaRPr>
           </a:p>
         </p:txBody>
       </p:sp>
@@ -4727,7 +4730,7 @@
           <p:nvPr/>
         </p:nvPicPr>
         <p:blipFill>
-          <a:blip r:embed="rId3"/>
+          <a:blip r:embed="rId4"/>
           <a:stretch>
             <a:fillRect/>
           </a:stretch>
@@ -7512,13 +7515,16 @@
           <a:lstStyle/>
           <a:p>
             <a:r>
-              <a:rPr lang="en-US" dirty="0">
-                <a:solidFill>
-                  <a:srgbClr val="FF0000"/>
-                </a:solidFill>
-              </a:rPr>
-              <a:t>compute-set-upper-src2.zip</a:t>
-            </a:r>
+              <a:rPr lang="en-US" u="sng" dirty="0">
+                <a:hlinkClick r:id="rId3" tooltip="compute-btn.zip"/>
+              </a:rPr>
+              <a:t>compute-btn.zip</a:t>
+            </a:r>
+            <a:endParaRPr lang="en-US" dirty="0">
+              <a:solidFill>
+                <a:srgbClr val="FF0000"/>
+              </a:solidFill>
+            </a:endParaRPr>
           </a:p>
         </p:txBody>
       </p:sp>
@@ -9067,13 +9073,16 @@
           <a:lstStyle/>
           <a:p>
             <a:r>
-              <a:rPr lang="en-US" dirty="0">
-                <a:solidFill>
-                  <a:srgbClr val="FF0000"/>
-                </a:solidFill>
-              </a:rPr>
-              <a:t>compute-set-upper-src2.zip</a:t>
-            </a:r>
+              <a:rPr lang="en-US">
+                <a:hlinkClick r:id="rId3" tooltip="compute-watch.zip"/>
+              </a:rPr>
+              <a:t>compute-watch.zip</a:t>
+            </a:r>
+            <a:endParaRPr lang="en-US" dirty="0">
+              <a:solidFill>
+                <a:srgbClr val="FF0000"/>
+              </a:solidFill>
+            </a:endParaRPr>
           </a:p>
         </p:txBody>
       </p:sp>
